--- a/dist/초3/수학/자연수계산/초3_수학_자연수계산_10_0이있는수의뺄셈_학생용.pptx
+++ b/dist/초3/수학/자연수계산/초3_수학_자연수계산_10_0이있는수의뺄셈_학생용.pptx
@@ -119,13 +119,13 @@
   <p:extLst>
     <p:ext uri="{521415D9-36F7-43E2-AB2F-B90AF26B5E84}">
       <p14:sectionLst xmlns:p14="http://schemas.microsoft.com/office/powerpoint/2010/main">
-        <p14:section name="도입" id="{938a0fdc-9980-bb67-4a4a-3e92fcdb5a2d}">
+        <p14:section name="도입" id="{d492d924-648f-8c1d-e2a7-56eb81533c9c}">
           <p14:sldIdLst>
             <p14:sldId id="256"/>
             <p14:sldId id="257"/>
           </p14:sldIdLst>
         </p14:section>
-        <p14:section name="개념" id="{232c428c-e79c-bcf8-8e0b-b009a34ededd}">
+        <p14:section name="개념" id="{ba8dc5fa-25c1-1021-3f32-d7ab1ecfec97}">
           <p14:sldIdLst>
             <p14:sldId id="258"/>
             <p14:sldId id="259"/>
@@ -133,31 +133,31 @@
             <p14:sldId id="262"/>
           </p14:sldIdLst>
         </p14:section>
-        <p14:section name="연습" id="{d9585b52-49aa-0e30-237c-569b117eaf8f}">
+        <p14:section name="연습" id="{ef82f417-4028-4b95-e541-475181cb52c6}">
           <p14:sldIdLst>
             <p14:sldId id="261"/>
             <p14:sldId id="263"/>
             <p14:sldId id="264"/>
           </p14:sldIdLst>
         </p14:section>
-        <p14:section name="개념" id="{ece12e76-d222-c6ad-536d-98b4910165ed}">
+        <p14:section name="개념" id="{8c2b831e-4627-c108-7607-f5e46dea106e}">
           <p14:sldIdLst/>
         </p14:section>
-        <p14:section name="연습" id="{4efcb6ea-df67-61f6-6f9a-d84112a60089}">
+        <p14:section name="연습" id="{309e8544-24f3-1766-1875-7d09db7683a0}">
           <p14:sldIdLst/>
         </p14:section>
-        <p14:section name="확인" id="{0e932eb5-6588-5f29-58b2-d7ccc9be24e5}">
+        <p14:section name="확인" id="{f4729d16-1567-5c22-74a1-563619ba9912}">
           <p14:sldIdLst>
             <p14:sldId id="265"/>
             <p14:sldId id="266"/>
           </p14:sldIdLst>
         </p14:section>
-        <p14:section name="정리" id="{c240a84a-e45a-bf4a-5c51-d35aec12d825}">
+        <p14:section name="정리" id="{db3da466-310c-f886-76b2-81f911e637ed}">
           <p14:sldIdLst>
             <p14:sldId id="267"/>
           </p14:sldIdLst>
         </p14:section>
-        <p14:section name="보충" id="{4c32950f-bf9a-0b80-cc84-0f2f90370658}">
+        <p14:section name="보충" id="{902edfa9-8dfa-f964-1187-1b113cdbbc1c}">
           <p14:sldIdLst>
             <p14:sldId id="268"/>
           </p14:sldIdLst>

--- a/dist/초3/수학/자연수계산/초3_수학_자연수계산_10_0이있는수의뺄셈_학생용.pptx
+++ b/dist/초3/수학/자연수계산/초3_수학_자연수계산_10_0이있는수의뺄셈_학생용.pptx
@@ -119,13 +119,13 @@
   <p:extLst>
     <p:ext uri="{521415D9-36F7-43E2-AB2F-B90AF26B5E84}">
       <p14:sectionLst xmlns:p14="http://schemas.microsoft.com/office/powerpoint/2010/main">
-        <p14:section name="도입" id="{d492d924-648f-8c1d-e2a7-56eb81533c9c}">
+        <p14:section name="도입" id="{d2dfe327-58d3-6b27-5922-cfd624048721}">
           <p14:sldIdLst>
             <p14:sldId id="256"/>
             <p14:sldId id="257"/>
           </p14:sldIdLst>
         </p14:section>
-        <p14:section name="개념" id="{ba8dc5fa-25c1-1021-3f32-d7ab1ecfec97}">
+        <p14:section name="개념" id="{79cbdbe5-ae8e-3dea-604a-fa2703b2f1fc}">
           <p14:sldIdLst>
             <p14:sldId id="258"/>
             <p14:sldId id="259"/>
@@ -133,31 +133,31 @@
             <p14:sldId id="262"/>
           </p14:sldIdLst>
         </p14:section>
-        <p14:section name="연습" id="{ef82f417-4028-4b95-e541-475181cb52c6}">
+        <p14:section name="연습" id="{d5add398-c2bf-4fab-8b47-3ac272a4808d}">
           <p14:sldIdLst>
             <p14:sldId id="261"/>
             <p14:sldId id="263"/>
             <p14:sldId id="264"/>
           </p14:sldIdLst>
         </p14:section>
-        <p14:section name="개념" id="{8c2b831e-4627-c108-7607-f5e46dea106e}">
+        <p14:section name="개념" id="{10dd5655-889c-7715-a6f9-5995e9d7482e}">
           <p14:sldIdLst/>
         </p14:section>
-        <p14:section name="연습" id="{309e8544-24f3-1766-1875-7d09db7683a0}">
+        <p14:section name="연습" id="{3a56d024-80d3-8ee2-14dd-cab3c2eaafc3}">
           <p14:sldIdLst/>
         </p14:section>
-        <p14:section name="확인" id="{f4729d16-1567-5c22-74a1-563619ba9912}">
+        <p14:section name="확인" id="{927edf4f-b4db-324b-0086-6777e6c2d5e1}">
           <p14:sldIdLst>
             <p14:sldId id="265"/>
             <p14:sldId id="266"/>
           </p14:sldIdLst>
         </p14:section>
-        <p14:section name="정리" id="{db3da466-310c-f886-76b2-81f911e637ed}">
+        <p14:section name="정리" id="{c80c3a4b-e93d-71d4-8b08-f8471eadc10f}">
           <p14:sldIdLst>
             <p14:sldId id="267"/>
           </p14:sldIdLst>
         </p14:section>
-        <p14:section name="보충" id="{902edfa9-8dfa-f964-1187-1b113cdbbc1c}">
+        <p14:section name="보충" id="{18ad5341-cade-09d9-72ae-f877e05ab848}">
           <p14:sldIdLst>
             <p14:sldId id="268"/>
           </p14:sldIdLst>
